--- a/Backend/services/pptx-generator-service/slides/_comum/secao_alambrado.pptx
+++ b/Backend/services/pptx-generator-service/slides/_comum/secao_alambrado.pptx
@@ -3239,7 +3239,7 @@
                 <a:latin typeface="Poppins"/>
                 <a:cs typeface="Poppins"/>
               </a:rPr>
-              <a:t> }} portões de acesso com dimensões de {{ </a:t>
+              <a:t> }} {{portoes_palavra}} de acesso com dimensões de {{ </a:t>
             </a:r>
             <a:r>
               <a:rPr lang="pt-BR" sz="1200" dirty="0" err="1">
@@ -3292,7 +3292,7 @@
                 <a:latin typeface="Poppins"/>
                 <a:cs typeface="Poppins"/>
               </a:rPr>
-              <a:t> }}, sendo os tubos verticais com diâmetro de 48,30mm e espessura de 2,25mm e os tubos horizontais com diâmetro de 42,60mm e espessura de 2,00mm pintados na cor verde;</a:t>
+              <a:t> }}, sendo os tubos verticais com diâmetro de 48,30mm e espessura de 2,25mm e os tubos horizontais com diâmetro de 42,60mm e espessura de 2,00mm pintados na cor {{cor_tubo}};</a:t>
             </a:r>
             <a:endParaRPr lang="en-US" sz="1200" dirty="0">
               <a:latin typeface="Poppins"/>
@@ -3317,7 +3317,7 @@
                 <a:latin typeface="Poppins"/>
                 <a:cs typeface="Poppins"/>
               </a:rPr>
-              <a:t>Tela malha 3” x 3” fio 12 revestida em PVC verde;</a:t>
+              <a:t>Tela malha {{tela_malha}} revestida em PVC {{cor_tela_malha}};</a:t>
             </a:r>
             <a:endParaRPr lang="en-US" sz="1200" dirty="0">
               <a:latin typeface="Poppins"/>
